--- a/docs/mcr_dp1_kv_reuse.pptx
+++ b/docs/mcr_dp1_kv_reuse.pptx
@@ -1553,7 +1553,7 @@
                 <a:ea typeface="Malgun Gothic" pitchFamily="34" charset="-122"/>
                 <a:cs typeface="Malgun Gothic" pitchFamily="34" charset="-120"/>
               </a:rPr>
-              <a:t>공백 ①(과제 필요성 Ⅱ): 재사용이 prefix 정확 일치·요청 수명에 갇혀 있고, 하위 tier 복원의 손익 판단이 없다 ⇒ 수십 k 토큰을 매 요청 전체 re-prefill — TTFT 지배 (R-03·04·05)</a:t>
+              <a:t>방향(전제): 비접두(non-contiguous) 재사용 채택 — prefix 전용은 RAG에서 hit 0이라 QA3(TTFT ≥2×) 커버리지 미달. baseline = CacheBlend(비접두 + 고정 비율 선택 재계산, TTFT 2.2–3.3×(B))</a:t>
             </a:r>
             <a:endParaRPr lang="en-US" sz="1150" dirty="0"/>
           </a:p>
@@ -1566,7 +1566,7 @@
               <a:buChar char="◆"/>
             </a:pPr>
             <a:r>
-              <a:rPr lang="en-US" sz="1150" dirty="0">
+              <a:rPr lang="en-US" sz="1150" b="1" dirty="0">
                 <a:solidFill>
                   <a:srgbClr val="262626"/>
                 </a:solidFill>
@@ -1574,7 +1574,7 @@
                 <a:ea typeface="Malgun Gothic" pitchFamily="34" charset="-122"/>
                 <a:cs typeface="Malgun Gothic" pitchFamily="34" charset="-120"/>
               </a:rPr>
-              <a:t>압력 → (커버리지 확장): RAG는 chunk 순서·프롬프트 변경만으로 prefix hit 0 — 비접두 재사용 없이는 워크로드 3종 전반 TTFT ≥ 2×(QA3) 미달 위험. CacheBlend: 비접두+선택 재계산으로 TTFT 2.2–3.3×(B)</a:t>
+              <a:t>문제: baseline을 채택해도 잔여 상한(floor)이 남는다 — 본 DP는 이 잔여를 깎는 자체 개선 구조의 결정</a:t>
             </a:r>
             <a:endParaRPr lang="en-US" sz="1150" dirty="0"/>
           </a:p>
@@ -1595,7 +1595,7 @@
                 <a:ea typeface="Malgun Gothic" pitchFamily="34" charset="-122"/>
                 <a:cs typeface="Malgun Gothic" pitchFamily="34" charset="-120"/>
               </a:rPr>
-              <a:t>압력 ← (무손실·단순성): 비접두 재사용은 cross-attention 무시의 품질 비용 F1/Rouge-L 0.01–0.03(B) — QA2 gate(ΔF1 ≤ 1%p 요청별)와 긴장. 부분 재계산 경로는 prefill 파이프라인 코어에 배선(QA5 감점 요인)</a:t>
+              <a:t>잔여 ①: 선택 재계산(HKVD 10–15%(B))과 chunk KV 로딩 I/O가 여전히 온라인 임계 경로에 있음 — 하위 tier일수록 I/O 노출 확대, TTFT 하한 형성</a:t>
             </a:r>
             <a:endParaRPr lang="en-US" sz="1150" dirty="0"/>
           </a:p>
@@ -1616,7 +1616,28 @@
                 <a:ea typeface="Malgun Gothic" pitchFamily="34" charset="-122"/>
                 <a:cs typeface="Malgun Gothic" pitchFamily="34" charset="-120"/>
               </a:rPr>
-              <a:t>복원 역전: tier 대역폭 계단(~10×/tier)에서 SSD 복원이 재계산보다 느린 구간이 실재(C) — 판단 구조 없는 영속화는 이득을 스스로 상쇄</a:t>
+              <a:t>잔여 ②: 재계산 비율이 정적·전역 고정 — 요청별 품질 예산(QA2 요청별 bound)과 무관하게 일률 적용</a:t>
+            </a:r>
+            <a:endParaRPr lang="en-US" sz="1150" dirty="0"/>
+          </a:p>
+          <a:p>
+            <a:pPr algn="l" marL="177800" indent="-177800">
+              <a:spcAft>
+                <a:spcPts val="600"/>
+              </a:spcAft>
+              <a:buSzPct val="100000"/>
+              <a:buChar char="◆"/>
+            </a:pPr>
+            <a:r>
+              <a:rPr lang="en-US" sz="1150" dirty="0">
+                <a:solidFill>
+                  <a:srgbClr val="262626"/>
+                </a:solidFill>
+                <a:latin typeface="Malgun Gothic" pitchFamily="34" charset="0"/>
+                <a:ea typeface="Malgun Gothic" pitchFamily="34" charset="-122"/>
+                <a:cs typeface="Malgun Gothic" pitchFamily="34" charset="-120"/>
+              </a:rPr>
+              <a:t>잔여 ③: 적용 범위가 요청 파이프라인에 한정 — 세션·사용자 영속(multiturn·agent)은 수동적 저장뿐, 무엇을 상위 tier에 두는가의 결정 부재</a:t>
             </a:r>
             <a:endParaRPr lang="en-US" sz="1150" dirty="0"/>
           </a:p>
@@ -1740,7 +1761,7 @@
                 <a:ea typeface="Malgun Gothic" pitchFamily="34" charset="-122"/>
                 <a:cs typeface="Malgun Gothic" pitchFamily="34" charset="-120"/>
               </a:rPr>
-              <a:t>1. hit 판정의 주소화 방식 — prefix(radix) 트리인가, 내용 주소화(chunk) + 부분 재계산 경로 신설인가 (KV Index 구조와 prefill 실행 흐름이 갈림)</a:t>
+              <a:t>1. 잔여 작업(blend·배치)을 언제 수행하나 — 쓰기/유휴 시점(사전 가공)인가, 읽기 시점(요청 적응)인가 — eager vs lazy의 고전 축</a:t>
             </a:r>
             <a:endParaRPr lang="en-US" sz="1150" dirty="0"/>
           </a:p>
@@ -1760,7 +1781,7 @@
                 <a:ea typeface="Malgun Gothic" pitchFamily="34" charset="-122"/>
                 <a:cs typeface="Malgun Gothic" pitchFamily="34" charset="-120"/>
               </a:rPr>
-              <a:t>2. 영속 단위·공유 범위 — 세션 내 vs 사용자 단위, 동일 chunk의 세션 간 공유(dedup)를 인정하는가 (용량·격리에 영향)</a:t>
+              <a:t>2. 재계산 비율의 결정 주체 — 사전 확정(가공 시점 고정)인가, 요청별 품질 예산 연동(SLO/bound 기반 동적)인가</a:t>
             </a:r>
             <a:endParaRPr lang="en-US" sz="1150" dirty="0"/>
           </a:p>
@@ -1780,7 +1801,7 @@
                 <a:ea typeface="Malgun Gothic" pitchFamily="34" charset="-122"/>
                 <a:cs typeface="Malgun Gothic" pitchFamily="34" charset="-120"/>
               </a:rPr>
-              <a:t>3. 하위 tier hit의 활용 판단 — 무조건 복원(고정 규칙)인가, 복원 vs 재계산 비용 추정기(+telemetry 결합)를 두는가</a:t>
+              <a:t>3. 상위 tier 상주 대상의 선정 — 인기도/조합 예측(사전 승격)인가, 접근 시점 승격(LRU류)인가 — 예측 실패 시 낭비의 귀속</a:t>
             </a:r>
             <a:endParaRPr lang="en-US" sz="1150" dirty="0"/>
           </a:p>
@@ -1800,7 +1821,7 @@
                 <a:ea typeface="Malgun Gothic" pitchFamily="34" charset="-122"/>
                 <a:cs typeface="Malgun Gothic" pitchFamily="34" charset="-120"/>
               </a:rPr>
-              <a:t>4. (DP2·DP4 커플링) 재사용 대상 KV의 pruning 허용 여부는 DP2(자산 표현)가, 판단 정책이 사는 곳은 DP4(조율 주체)가 제약 — 본 DP는 두 결정의 상류 입력</a:t>
+              <a:t>4. (DP2·DP4 커플링) 가공본(fused KV)의 pruning 허용·사본 관리는 DP2(자산 표현)가, 예측·예산 정책이 사는 곳은 DP4(조율 주체)가 제약</a:t>
             </a:r>
             <a:endParaRPr lang="en-US" sz="1150" dirty="0"/>
           </a:p>
@@ -2453,7 +2474,7 @@
                 <a:ea typeface="Malgun Gothic" pitchFamily="34" charset="-122"/>
                 <a:cs typeface="Malgun Gothic" pitchFamily="34" charset="-120"/>
               </a:rPr>
-              <a:t>후보 1 — prefix 보수형 (정확 일치 · 즉시 복원)</a:t>
+              <a:t>후보 1 — 사전 가공형 (store-time pre-blend, eager)</a:t>
             </a:r>
             <a:endParaRPr lang="en-US" sz="1100" dirty="0"/>
           </a:p>
@@ -2517,7 +2538,7 @@
                 <a:ea typeface="Malgun Gothic" pitchFamily="34" charset="-122"/>
                 <a:cs typeface="Malgun Gothic" pitchFamily="34" charset="-120"/>
               </a:rPr>
-              <a:t>후보 2 — 비접두 확장형 (내용 주소화 · 선택 재계산 · 비용 판단)</a:t>
+              <a:t>후보 2 — 요청 적응형 (read-time adaptive recompute, lazy)</a:t>
             </a:r>
             <a:endParaRPr lang="en-US" sz="1100" dirty="0"/>
           </a:p>
@@ -2809,7 +2830,7 @@
                 <a:ea typeface="Malgun Gothic" pitchFamily="34" charset="-122"/>
                 <a:cs typeface="Malgun Gothic" pitchFamily="34" charset="-120"/>
               </a:rPr>
-              <a:t>KV Index = prefix(radix) 트리 — 접두 일치 시만 hit. 세션·사용자 영속 + hit 시 즉시 복원(고정 규칙). 신규 컴포넌트 0 — 모듈 국소 변경</a:t>
+              <a:t>유휴/저부하 시간에 인기 chunk 조합을 미리 blending(Background KV Refiner) 후 상위 tier에 상주(warm) — 온라인 hit 경로는 순수 load. 신규: 백그라운드 가공기 + 인기도/조합 예측기 + 승격 경로</a:t>
             </a:r>
             <a:endParaRPr lang="en-US" sz="950" dirty="0"/>
           </a:p>
@@ -2877,7 +2898,7 @@
                 <a:ea typeface="Malgun Gothic" pitchFamily="34" charset="-122"/>
                 <a:cs typeface="Malgun Gothic" pitchFamily="34" charset="-120"/>
               </a:rPr>
-              <a:t>KV Index = 내용 주소화 chunk 인덱스(비접두 hit·chunk dedup) + prefill에 선택 재계산(HKVD) 경로 신설 + 복원 vs 재계산 비용 추정기(telemetry 결합)</a:t>
+              <a:t>저장은 원본 chunk 그대로 — hit 시점에 요청별 품질 예산(SLO/bound)으로 재계산율을 동적 결정(Quality-budget Controller)하고 로딩∥재계산을 중첩(pipelining). 신규: 예산 컨트롤러 + 중첩 스케줄</a:t>
             </a:r>
             <a:endParaRPr lang="en-US" sz="950" dirty="0"/>
           </a:p>
@@ -3009,7 +3030,7 @@
                 <a:ea typeface="Malgun Gothic" pitchFamily="34" charset="-122"/>
                 <a:cs typeface="Malgun Gothic" pitchFamily="34" charset="-120"/>
               </a:rPr>
-              <a:t>재사용에 의한 품질 저하 = 0 (구조적 보장 — QA2 ★★★의 직접 근거)</a:t>
+              <a:t>온라인 경로에서 재계산·복원 제거 — baseline 잔여 ①을 구조적으로 소거(QA3 상한 돌파)</a:t>
             </a:r>
             <a:endParaRPr lang="en-US" sz="950" dirty="0"/>
           </a:p>
@@ -3030,7 +3051,7 @@
                 <a:ea typeface="Malgun Gothic" pitchFamily="34" charset="-122"/>
                 <a:cs typeface="Malgun Gothic" pitchFamily="34" charset="-120"/>
               </a:rPr>
-              <a:t>인덱스·파이프라인 무변경 — KV 구조 변화(MLA 등) 수용 시 재작업 최소(QA5)</a:t>
+              <a:t>가공·승격이 유휴 시간대 자원 사용 — 피크 prefill 자원 보존(QA1)</a:t>
             </a:r>
             <a:endParaRPr lang="en-US" sz="950" dirty="0"/>
           </a:p>
@@ -3098,7 +3119,7 @@
                 <a:ea typeface="Malgun Gothic" pitchFamily="34" charset="-122"/>
                 <a:cs typeface="Malgun Gothic" pitchFamily="34" charset="-120"/>
               </a:rPr>
-              <a:t>RAG 포함 전 워크로드 커버 — TTFT 2.2–3.3×(B, CacheBlend)로 QA3 bin 직접 달성</a:t>
+              <a:t>낭비 0 — 쓰이는 요청만 계산·원본만 저장, 신선도 문제 없음(QA4)</a:t>
             </a:r>
             <a:endParaRPr lang="en-US" sz="950" dirty="0"/>
           </a:p>
@@ -3119,7 +3140,7 @@
                 <a:ea typeface="Malgun Gothic" pitchFamily="34" charset="-122"/>
                 <a:cs typeface="Malgun Gothic" pitchFamily="34" charset="-120"/>
               </a:rPr>
-              <a:t>chunk 공유(dedup)로 유효 용량 기여(QA4) + 비용 판단으로 복원 역전 회피</a:t>
+              <a:t>요청별 bound 집행과 직결 — 예산 여유 요청은 재계산↑로 품질 방어(QA2 ★★★ 조건 충족)</a:t>
             </a:r>
             <a:endParaRPr lang="en-US" sz="950" dirty="0"/>
           </a:p>
@@ -3251,7 +3272,7 @@
                 <a:ea typeface="Malgun Gothic" pitchFamily="34" charset="-122"/>
                 <a:cs typeface="Malgun Gothic" pitchFamily="34" charset="-120"/>
               </a:rPr>
-              <a:t>RAG chunk 재배열에 hit 0 — 3종 워크로드 전반 TTFT 2× 미달 위험(QA3)</a:t>
+              <a:t>조합 예측 실패 = 사전 연산·저장 낭비, fused 사본의 신선도·일관성 관리(QA4 감점)</a:t>
             </a:r>
             <a:endParaRPr lang="en-US" sz="950" dirty="0"/>
           </a:p>
@@ -3272,7 +3293,7 @@
                 <a:ea typeface="Malgun Gothic" pitchFamily="34" charset="-122"/>
                 <a:cs typeface="Malgun Gothic" pitchFamily="34" charset="-120"/>
               </a:rPr>
-              <a:t>chunk 공유 불가(세션별 중복 저장) + 복원 역전 구간 무방비(QA4·QA3)</a:t>
+              <a:t>재계산율이 가공 시점에 확정 — 요청별 품질 예산 대응 불가, 전역 bound만(QA2 ★★☆ 조건)</a:t>
             </a:r>
             <a:endParaRPr lang="en-US" sz="950" dirty="0"/>
           </a:p>
@@ -3340,7 +3361,7 @@
                 <a:ea typeface="Malgun Gothic" pitchFamily="34" charset="-122"/>
                 <a:cs typeface="Malgun Gothic" pitchFamily="34" charset="-120"/>
               </a:rPr>
-              <a:t>품질 비용 0.01–0.03(B) — 요청별 bound(QA2) 집행 설계 부담·검증 비용</a:t>
+              <a:t>재계산·I/O가 온라인 임계 경로에 잔존 — TTFT 개선이 중첩 효율의 한계에 막힘(QA3)</a:t>
             </a:r>
             <a:endParaRPr lang="en-US" sz="950" dirty="0"/>
           </a:p>
@@ -3361,7 +3382,7 @@
                 <a:ea typeface="Malgun Gothic" pitchFamily="34" charset="-122"/>
                 <a:cs typeface="Malgun Gothic" pitchFamily="34" charset="-120"/>
               </a:rPr>
-              <a:t>재계산 경로가 코어 배선 — KV 구조 변화 시 인덱스·재계산 로직 재작업(QA5)</a:t>
+              <a:t>피크 시간에 재계산 수행 — prefill 자원 소비가 batch 여력 잠식(QA1)</a:t>
             </a:r>
             <a:endParaRPr lang="en-US" sz="950" dirty="0"/>
           </a:p>
@@ -3502,15 +3523,15 @@
               <a:buChar char="◆"/>
             </a:pPr>
             <a:r>
-              <a:rPr lang="en-US" sz="950" dirty="0">
-                <a:solidFill>
-                  <a:srgbClr val="262626"/>
-                </a:solidFill>
-                <a:latin typeface="Malgun Gothic" pitchFamily="34" charset="0"/>
-                <a:ea typeface="Malgun Gothic" pitchFamily="34" charset="-122"/>
-                <a:cs typeface="Malgun Gothic" pitchFamily="34" charset="-120"/>
-              </a:rPr>
-              <a:t>QA1 ★★☆</a:t>
+              <a:rPr lang="en-US" sz="950" b="1" dirty="0">
+                <a:solidFill>
+                  <a:srgbClr val="1B7A4B"/>
+                </a:solidFill>
+                <a:latin typeface="Malgun Gothic" pitchFamily="34" charset="0"/>
+                <a:ea typeface="Malgun Gothic" pitchFamily="34" charset="-122"/>
+                <a:cs typeface="Malgun Gothic" pitchFamily="34" charset="-120"/>
+              </a:rPr>
+              <a:t>QA1 ★★★</a:t>
             </a:r>
             <a:pPr algn="l" indent="0" marL="0">
               <a:spcAft>
@@ -3538,13 +3559,13 @@
             <a:r>
               <a:rPr lang="en-US" sz="950" b="1" dirty="0">
                 <a:solidFill>
-                  <a:srgbClr val="1B7A4B"/>
-                </a:solidFill>
-                <a:latin typeface="Malgun Gothic" pitchFamily="34" charset="0"/>
-                <a:ea typeface="Malgun Gothic" pitchFamily="34" charset="-122"/>
-                <a:cs typeface="Malgun Gothic" pitchFamily="34" charset="-120"/>
-              </a:rPr>
-              <a:t>QA2 ★★★</a:t>
+                  <a:srgbClr val="B3402A"/>
+                </a:solidFill>
+                <a:latin typeface="Malgun Gothic" pitchFamily="34" charset="0"/>
+                <a:ea typeface="Malgun Gothic" pitchFamily="34" charset="-122"/>
+                <a:cs typeface="Malgun Gothic" pitchFamily="34" charset="-120"/>
+              </a:rPr>
+              <a:t>QA2 ★★☆</a:t>
             </a:r>
             <a:pPr algn="l" indent="0" marL="0">
               <a:spcAft>
@@ -3572,13 +3593,13 @@
             <a:r>
               <a:rPr lang="en-US" sz="950" b="1" dirty="0">
                 <a:solidFill>
-                  <a:srgbClr val="B3402A"/>
-                </a:solidFill>
-                <a:latin typeface="Malgun Gothic" pitchFamily="34" charset="0"/>
-                <a:ea typeface="Malgun Gothic" pitchFamily="34" charset="-122"/>
-                <a:cs typeface="Malgun Gothic" pitchFamily="34" charset="-120"/>
-              </a:rPr>
-              <a:t>QA3 ★★☆</a:t>
+                  <a:srgbClr val="1B7A4B"/>
+                </a:solidFill>
+                <a:latin typeface="Malgun Gothic" pitchFamily="34" charset="0"/>
+                <a:ea typeface="Malgun Gothic" pitchFamily="34" charset="-122"/>
+                <a:cs typeface="Malgun Gothic" pitchFamily="34" charset="-120"/>
+              </a:rPr>
+              <a:t>QA3 ★★★</a:t>
             </a:r>
             <a:pPr algn="l" indent="0" marL="0">
               <a:spcAft>
@@ -3595,7 +3616,7 @@
                 <a:ea typeface="Malgun Gothic" pitchFamily="34" charset="-122"/>
                 <a:cs typeface="Malgun Gothic" pitchFamily="34" charset="-120"/>
               </a:rPr>
-              <a:t> · QA4 ★★☆ · </a:t>
+              <a:t> · </a:t>
             </a:r>
             <a:pPr algn="l" indent="0" marL="0">
               <a:spcAft>
@@ -3606,13 +3627,13 @@
             <a:r>
               <a:rPr lang="en-US" sz="950" b="1" dirty="0">
                 <a:solidFill>
-                  <a:srgbClr val="1B7A4B"/>
-                </a:solidFill>
-                <a:latin typeface="Malgun Gothic" pitchFamily="34" charset="0"/>
-                <a:ea typeface="Malgun Gothic" pitchFamily="34" charset="-122"/>
-                <a:cs typeface="Malgun Gothic" pitchFamily="34" charset="-120"/>
-              </a:rPr>
-              <a:t>QA5 ★★★</a:t>
+                  <a:srgbClr val="B3402A"/>
+                </a:solidFill>
+                <a:latin typeface="Malgun Gothic" pitchFamily="34" charset="0"/>
+                <a:ea typeface="Malgun Gothic" pitchFamily="34" charset="-122"/>
+                <a:cs typeface="Malgun Gothic" pitchFamily="34" charset="-120"/>
+              </a:rPr>
+              <a:t>QA4 ★★☆</a:t>
             </a:r>
             <a:pPr algn="l" indent="0" marL="0">
               <a:spcAft>
@@ -3629,7 +3650,7 @@
                 <a:ea typeface="Malgun Gothic" pitchFamily="34" charset="-122"/>
                 <a:cs typeface="Malgun Gothic" pitchFamily="34" charset="-120"/>
               </a:rPr>
-              <a:t>  — 무손실·단순성 축 우위 (F)</a:t>
+              <a:t> · QA5 ★★☆  — 지연·피크 자원 축 우위 (F)</a:t>
             </a:r>
             <a:endParaRPr lang="en-US" sz="950" dirty="0"/>
           </a:p>
@@ -3689,9 +3710,9 @@
               <a:buChar char="◆"/>
             </a:pPr>
             <a:r>
-              <a:rPr lang="en-US" sz="950" dirty="0">
-                <a:solidFill>
-                  <a:srgbClr val="262626"/>
+              <a:rPr lang="en-US" sz="950" b="1" dirty="0">
+                <a:solidFill>
+                  <a:srgbClr val="B3402A"/>
                 </a:solidFill>
                 <a:latin typeface="Malgun Gothic" pitchFamily="34" charset="0"/>
                 <a:ea typeface="Malgun Gothic" pitchFamily="34" charset="-122"/>
@@ -3725,13 +3746,13 @@
             <a:r>
               <a:rPr lang="en-US" sz="950" b="1" dirty="0">
                 <a:solidFill>
-                  <a:srgbClr val="B3402A"/>
-                </a:solidFill>
-                <a:latin typeface="Malgun Gothic" pitchFamily="34" charset="0"/>
-                <a:ea typeface="Malgun Gothic" pitchFamily="34" charset="-122"/>
-                <a:cs typeface="Malgun Gothic" pitchFamily="34" charset="-120"/>
-              </a:rPr>
-              <a:t>QA2 ★★☆</a:t>
+                  <a:srgbClr val="1B7A4B"/>
+                </a:solidFill>
+                <a:latin typeface="Malgun Gothic" pitchFamily="34" charset="0"/>
+                <a:ea typeface="Malgun Gothic" pitchFamily="34" charset="-122"/>
+                <a:cs typeface="Malgun Gothic" pitchFamily="34" charset="-120"/>
+              </a:rPr>
+              <a:t>QA2 ★★★</a:t>
             </a:r>
             <a:pPr algn="l" indent="0" marL="0">
               <a:spcAft>
@@ -3759,13 +3780,13 @@
             <a:r>
               <a:rPr lang="en-US" sz="950" b="1" dirty="0">
                 <a:solidFill>
-                  <a:srgbClr val="1B7A4B"/>
-                </a:solidFill>
-                <a:latin typeface="Malgun Gothic" pitchFamily="34" charset="0"/>
-                <a:ea typeface="Malgun Gothic" pitchFamily="34" charset="-122"/>
-                <a:cs typeface="Malgun Gothic" pitchFamily="34" charset="-120"/>
-              </a:rPr>
-              <a:t>QA3 ★★★</a:t>
+                  <a:srgbClr val="B3402A"/>
+                </a:solidFill>
+                <a:latin typeface="Malgun Gothic" pitchFamily="34" charset="0"/>
+                <a:ea typeface="Malgun Gothic" pitchFamily="34" charset="-122"/>
+                <a:cs typeface="Malgun Gothic" pitchFamily="34" charset="-120"/>
+              </a:rPr>
+              <a:t>QA3 ★★☆</a:t>
             </a:r>
             <a:pPr algn="l" indent="0" marL="0">
               <a:spcAft>
@@ -3816,41 +3837,7 @@
                 <a:ea typeface="Malgun Gothic" pitchFamily="34" charset="-122"/>
                 <a:cs typeface="Malgun Gothic" pitchFamily="34" charset="-120"/>
               </a:rPr>
-              <a:t> · </a:t>
-            </a:r>
-            <a:pPr algn="l" indent="0" marL="0">
-              <a:spcAft>
-                <a:spcPts val="600"/>
-              </a:spcAft>
-              <a:buNone/>
-            </a:pPr>
-            <a:r>
-              <a:rPr lang="en-US" sz="950" b="1" dirty="0">
-                <a:solidFill>
-                  <a:srgbClr val="B3402A"/>
-                </a:solidFill>
-                <a:latin typeface="Malgun Gothic" pitchFamily="34" charset="0"/>
-                <a:ea typeface="Malgun Gothic" pitchFamily="34" charset="-122"/>
-                <a:cs typeface="Malgun Gothic" pitchFamily="34" charset="-120"/>
-              </a:rPr>
-              <a:t>QA5 ★★☆</a:t>
-            </a:r>
-            <a:pPr algn="l" indent="0" marL="0">
-              <a:spcAft>
-                <a:spcPts val="600"/>
-              </a:spcAft>
-              <a:buNone/>
-            </a:pPr>
-            <a:r>
-              <a:rPr lang="en-US" sz="950" dirty="0">
-                <a:solidFill>
-                  <a:srgbClr val="262626"/>
-                </a:solidFill>
-                <a:latin typeface="Malgun Gothic" pitchFamily="34" charset="0"/>
-                <a:ea typeface="Malgun Gothic" pitchFamily="34" charset="-122"/>
-                <a:cs typeface="Malgun Gothic" pitchFamily="34" charset="-120"/>
-              </a:rPr>
-              <a:t>  — 커버리지·용량 축 우위 (F)</a:t>
+              <a:t> · QA5 ★★☆  — 품질 집행·용량 축 우위 (F)</a:t>
             </a:r>
             <a:endParaRPr lang="en-US" sz="950" dirty="0"/>
           </a:p>
